--- a/public/videos/repositories/hoiku-map/hoiku-map-tech-preview.pptx
+++ b/public/videos/repositories/hoiku-map/hoiku-map-tech-preview.pptx
@@ -134,7 +134,7 @@
           <p:cNvPr id="2" name="タイトル 1">
             <a:extLst>
               <a:ext uri="{FF2B5EF4-FFF2-40B4-BE49-F238E27FC236}">
-                <a16:creationId xmlns:a16="http://schemas.microsoft.com/office/drawing/2014/main" id="{441BE1C9-5671-4BC4-AD0A-497D813B4A6D}"/>
+                <a16:creationId xmlns:a16="http://schemas.microsoft.com/office/drawing/2014/main" id="{ED5E501C-037C-EDA8-43CD-7D8B3398D0B8}"/>
               </a:ext>
             </a:extLst>
           </p:cNvPr>
@@ -171,7 +171,7 @@
           <p:cNvPr id="3" name="字幕 2">
             <a:extLst>
               <a:ext uri="{FF2B5EF4-FFF2-40B4-BE49-F238E27FC236}">
-                <a16:creationId xmlns:a16="http://schemas.microsoft.com/office/drawing/2014/main" id="{C0265B18-78FF-EEF3-7E30-E7BF78595D12}"/>
+                <a16:creationId xmlns:a16="http://schemas.microsoft.com/office/drawing/2014/main" id="{0837ACDD-40CD-5C98-97FA-829D96EDA982}"/>
               </a:ext>
             </a:extLst>
           </p:cNvPr>
@@ -241,7 +241,7 @@
           <p:cNvPr id="4" name="日付プレースホルダー 3">
             <a:extLst>
               <a:ext uri="{FF2B5EF4-FFF2-40B4-BE49-F238E27FC236}">
-                <a16:creationId xmlns:a16="http://schemas.microsoft.com/office/drawing/2014/main" id="{A0A8AAC0-753A-20EB-44C1-E9603950F6E6}"/>
+                <a16:creationId xmlns:a16="http://schemas.microsoft.com/office/drawing/2014/main" id="{C747C1BC-0CE5-C88F-ABEE-46C8A0E088CA}"/>
               </a:ext>
             </a:extLst>
           </p:cNvPr>
@@ -257,7 +257,7 @@
           <a:bodyPr/>
           <a:lstStyle/>
           <a:p>
-            <a:fld id="{6F73885A-2398-4E9A-88D7-F47FFA467487}" type="datetimeFigureOut">
+            <a:fld id="{7305A188-8A03-4CAE-87BC-8FFFEDE8EC66}" type="datetimeFigureOut">
               <a:rPr kumimoji="1" lang="ja-JP" altLang="en-US" smtClean="0"/>
               <a:t>2026/7/30</a:t>
             </a:fld>
@@ -270,7 +270,7 @@
           <p:cNvPr id="5" name="フッター プレースホルダー 4">
             <a:extLst>
               <a:ext uri="{FF2B5EF4-FFF2-40B4-BE49-F238E27FC236}">
-                <a16:creationId xmlns:a16="http://schemas.microsoft.com/office/drawing/2014/main" id="{16492153-3E52-33C5-1CFF-B07D2C943E4D}"/>
+                <a16:creationId xmlns:a16="http://schemas.microsoft.com/office/drawing/2014/main" id="{38A87895-A971-4F94-CC28-3B7DA1DA873D}"/>
               </a:ext>
             </a:extLst>
           </p:cNvPr>
@@ -295,7 +295,7 @@
           <p:cNvPr id="6" name="スライド番号プレースホルダー 5">
             <a:extLst>
               <a:ext uri="{FF2B5EF4-FFF2-40B4-BE49-F238E27FC236}">
-                <a16:creationId xmlns:a16="http://schemas.microsoft.com/office/drawing/2014/main" id="{FAC836BD-C6D4-3274-4C47-985AD59D5435}"/>
+                <a16:creationId xmlns:a16="http://schemas.microsoft.com/office/drawing/2014/main" id="{34AFA2FB-37EC-9F29-DD25-AEE67B11922C}"/>
               </a:ext>
             </a:extLst>
           </p:cNvPr>
@@ -311,7 +311,7 @@
           <a:bodyPr/>
           <a:lstStyle/>
           <a:p>
-            <a:fld id="{0A7A3E27-96CB-4210-9F81-990FF65E78A3}" type="slidenum">
+            <a:fld id="{1C99768D-03BE-4508-990C-439EC936EF6D}" type="slidenum">
               <a:rPr kumimoji="1" lang="ja-JP" altLang="en-US" smtClean="0"/>
               <a:t>‹#›</a:t>
             </a:fld>
@@ -322,7 +322,7 @@
     </p:spTree>
     <p:extLst>
       <p:ext uri="{BB962C8B-B14F-4D97-AF65-F5344CB8AC3E}">
-        <p14:creationId xmlns:p14="http://schemas.microsoft.com/office/powerpoint/2010/main" val="2209563387"/>
+        <p14:creationId xmlns:p14="http://schemas.microsoft.com/office/powerpoint/2010/main" val="4274552997"/>
       </p:ext>
     </p:extLst>
   </p:cSld>
@@ -354,7 +354,7 @@
           <p:cNvPr id="2" name="タイトル 1">
             <a:extLst>
               <a:ext uri="{FF2B5EF4-FFF2-40B4-BE49-F238E27FC236}">
-                <a16:creationId xmlns:a16="http://schemas.microsoft.com/office/drawing/2014/main" id="{D028B30F-15D0-A655-BD07-08ED16E50F6E}"/>
+                <a16:creationId xmlns:a16="http://schemas.microsoft.com/office/drawing/2014/main" id="{9C909213-E6AB-A0F4-2EFA-7D2DA75021B0}"/>
               </a:ext>
             </a:extLst>
           </p:cNvPr>
@@ -382,7 +382,7 @@
           <p:cNvPr id="3" name="縦書きテキスト プレースホルダー 2">
             <a:extLst>
               <a:ext uri="{FF2B5EF4-FFF2-40B4-BE49-F238E27FC236}">
-                <a16:creationId xmlns:a16="http://schemas.microsoft.com/office/drawing/2014/main" id="{E629233C-F822-3C11-4F31-1B8E3E71FE97}"/>
+                <a16:creationId xmlns:a16="http://schemas.microsoft.com/office/drawing/2014/main" id="{179DAF2C-AD20-188C-1B9E-5D159902EB06}"/>
               </a:ext>
             </a:extLst>
           </p:cNvPr>
@@ -471,7 +471,7 @@
           <p:cNvPr id="4" name="日付プレースホルダー 3">
             <a:extLst>
               <a:ext uri="{FF2B5EF4-FFF2-40B4-BE49-F238E27FC236}">
-                <a16:creationId xmlns:a16="http://schemas.microsoft.com/office/drawing/2014/main" id="{873633E4-1B83-00BA-D4DD-BE50E8940FF3}"/>
+                <a16:creationId xmlns:a16="http://schemas.microsoft.com/office/drawing/2014/main" id="{CC7572FE-D293-77B7-87AA-5997BD664EF1}"/>
               </a:ext>
             </a:extLst>
           </p:cNvPr>
@@ -487,7 +487,7 @@
           <a:bodyPr/>
           <a:lstStyle/>
           <a:p>
-            <a:fld id="{6F73885A-2398-4E9A-88D7-F47FFA467487}" type="datetimeFigureOut">
+            <a:fld id="{7305A188-8A03-4CAE-87BC-8FFFEDE8EC66}" type="datetimeFigureOut">
               <a:rPr kumimoji="1" lang="ja-JP" altLang="en-US" smtClean="0"/>
               <a:t>2026/7/30</a:t>
             </a:fld>
@@ -500,7 +500,7 @@
           <p:cNvPr id="5" name="フッター プレースホルダー 4">
             <a:extLst>
               <a:ext uri="{FF2B5EF4-FFF2-40B4-BE49-F238E27FC236}">
-                <a16:creationId xmlns:a16="http://schemas.microsoft.com/office/drawing/2014/main" id="{1F9E4687-8BCE-C713-9B62-4266982C8294}"/>
+                <a16:creationId xmlns:a16="http://schemas.microsoft.com/office/drawing/2014/main" id="{4158F7C6-6F65-A9B7-E929-10BEEE40CD20}"/>
               </a:ext>
             </a:extLst>
           </p:cNvPr>
@@ -525,7 +525,7 @@
           <p:cNvPr id="6" name="スライド番号プレースホルダー 5">
             <a:extLst>
               <a:ext uri="{FF2B5EF4-FFF2-40B4-BE49-F238E27FC236}">
-                <a16:creationId xmlns:a16="http://schemas.microsoft.com/office/drawing/2014/main" id="{EB0292D9-F025-CF9E-CB9D-B3F368A46C60}"/>
+                <a16:creationId xmlns:a16="http://schemas.microsoft.com/office/drawing/2014/main" id="{265EC9BE-1879-E7D4-98C8-88F7701D6EF4}"/>
               </a:ext>
             </a:extLst>
           </p:cNvPr>
@@ -541,7 +541,7 @@
           <a:bodyPr/>
           <a:lstStyle/>
           <a:p>
-            <a:fld id="{0A7A3E27-96CB-4210-9F81-990FF65E78A3}" type="slidenum">
+            <a:fld id="{1C99768D-03BE-4508-990C-439EC936EF6D}" type="slidenum">
               <a:rPr kumimoji="1" lang="ja-JP" altLang="en-US" smtClean="0"/>
               <a:t>‹#›</a:t>
             </a:fld>
@@ -552,7 +552,7 @@
     </p:spTree>
     <p:extLst>
       <p:ext uri="{BB962C8B-B14F-4D97-AF65-F5344CB8AC3E}">
-        <p14:creationId xmlns:p14="http://schemas.microsoft.com/office/powerpoint/2010/main" val="2404670000"/>
+        <p14:creationId xmlns:p14="http://schemas.microsoft.com/office/powerpoint/2010/main" val="3966516895"/>
       </p:ext>
     </p:extLst>
   </p:cSld>
@@ -584,7 +584,7 @@
           <p:cNvPr id="2" name="縦書きタイトル 1">
             <a:extLst>
               <a:ext uri="{FF2B5EF4-FFF2-40B4-BE49-F238E27FC236}">
-                <a16:creationId xmlns:a16="http://schemas.microsoft.com/office/drawing/2014/main" id="{1D98A6EE-41BE-BE10-5A78-D94E075CDA77}"/>
+                <a16:creationId xmlns:a16="http://schemas.microsoft.com/office/drawing/2014/main" id="{66EF1BF8-884C-C369-A806-3499FEBF48AF}"/>
               </a:ext>
             </a:extLst>
           </p:cNvPr>
@@ -617,7 +617,7 @@
           <p:cNvPr id="3" name="縦書きテキスト プレースホルダー 2">
             <a:extLst>
               <a:ext uri="{FF2B5EF4-FFF2-40B4-BE49-F238E27FC236}">
-                <a16:creationId xmlns:a16="http://schemas.microsoft.com/office/drawing/2014/main" id="{059214BA-B14F-B84A-CFE9-F091AF6DA86F}"/>
+                <a16:creationId xmlns:a16="http://schemas.microsoft.com/office/drawing/2014/main" id="{ECD85E7E-6B3E-18B7-5AF9-705B6CE01AFC}"/>
               </a:ext>
             </a:extLst>
           </p:cNvPr>
@@ -711,7 +711,7 @@
           <p:cNvPr id="4" name="日付プレースホルダー 3">
             <a:extLst>
               <a:ext uri="{FF2B5EF4-FFF2-40B4-BE49-F238E27FC236}">
-                <a16:creationId xmlns:a16="http://schemas.microsoft.com/office/drawing/2014/main" id="{BB8E96AA-3E71-355F-3ED1-241FF47FB909}"/>
+                <a16:creationId xmlns:a16="http://schemas.microsoft.com/office/drawing/2014/main" id="{2B09A0C8-EC5D-4484-A019-3C9F7A446D17}"/>
               </a:ext>
             </a:extLst>
           </p:cNvPr>
@@ -727,7 +727,7 @@
           <a:bodyPr/>
           <a:lstStyle/>
           <a:p>
-            <a:fld id="{6F73885A-2398-4E9A-88D7-F47FFA467487}" type="datetimeFigureOut">
+            <a:fld id="{7305A188-8A03-4CAE-87BC-8FFFEDE8EC66}" type="datetimeFigureOut">
               <a:rPr kumimoji="1" lang="ja-JP" altLang="en-US" smtClean="0"/>
               <a:t>2026/7/30</a:t>
             </a:fld>
@@ -740,7 +740,7 @@
           <p:cNvPr id="5" name="フッター プレースホルダー 4">
             <a:extLst>
               <a:ext uri="{FF2B5EF4-FFF2-40B4-BE49-F238E27FC236}">
-                <a16:creationId xmlns:a16="http://schemas.microsoft.com/office/drawing/2014/main" id="{EF01E945-32A7-5D61-352B-9248B2183444}"/>
+                <a16:creationId xmlns:a16="http://schemas.microsoft.com/office/drawing/2014/main" id="{30156E0C-D163-C8AF-DAA1-6C409F9D7F5C}"/>
               </a:ext>
             </a:extLst>
           </p:cNvPr>
@@ -765,7 +765,7 @@
           <p:cNvPr id="6" name="スライド番号プレースホルダー 5">
             <a:extLst>
               <a:ext uri="{FF2B5EF4-FFF2-40B4-BE49-F238E27FC236}">
-                <a16:creationId xmlns:a16="http://schemas.microsoft.com/office/drawing/2014/main" id="{6485D6AB-81B9-118C-42C7-B77C57E4D7E3}"/>
+                <a16:creationId xmlns:a16="http://schemas.microsoft.com/office/drawing/2014/main" id="{087FE591-B347-C63E-C11F-F177F76C4C16}"/>
               </a:ext>
             </a:extLst>
           </p:cNvPr>
@@ -781,7 +781,7 @@
           <a:bodyPr/>
           <a:lstStyle/>
           <a:p>
-            <a:fld id="{0A7A3E27-96CB-4210-9F81-990FF65E78A3}" type="slidenum">
+            <a:fld id="{1C99768D-03BE-4508-990C-439EC936EF6D}" type="slidenum">
               <a:rPr kumimoji="1" lang="ja-JP" altLang="en-US" smtClean="0"/>
               <a:t>‹#›</a:t>
             </a:fld>
@@ -792,7 +792,7 @@
     </p:spTree>
     <p:extLst>
       <p:ext uri="{BB962C8B-B14F-4D97-AF65-F5344CB8AC3E}">
-        <p14:creationId xmlns:p14="http://schemas.microsoft.com/office/powerpoint/2010/main" val="400580788"/>
+        <p14:creationId xmlns:p14="http://schemas.microsoft.com/office/powerpoint/2010/main" val="1610662336"/>
       </p:ext>
     </p:extLst>
   </p:cSld>
@@ -824,7 +824,7 @@
           <p:cNvPr id="2" name="タイトル 1">
             <a:extLst>
               <a:ext uri="{FF2B5EF4-FFF2-40B4-BE49-F238E27FC236}">
-                <a16:creationId xmlns:a16="http://schemas.microsoft.com/office/drawing/2014/main" id="{9073E87C-60D5-1278-23FE-E0DCCF1012C4}"/>
+                <a16:creationId xmlns:a16="http://schemas.microsoft.com/office/drawing/2014/main" id="{0802D646-F0B6-C65E-4E99-6434E890F9B9}"/>
               </a:ext>
             </a:extLst>
           </p:cNvPr>
@@ -852,7 +852,7 @@
           <p:cNvPr id="3" name="コンテンツ プレースホルダー 2">
             <a:extLst>
               <a:ext uri="{FF2B5EF4-FFF2-40B4-BE49-F238E27FC236}">
-                <a16:creationId xmlns:a16="http://schemas.microsoft.com/office/drawing/2014/main" id="{C3FA66D0-BDBB-5D79-F8C1-7CBF5C7B8A5F}"/>
+                <a16:creationId xmlns:a16="http://schemas.microsoft.com/office/drawing/2014/main" id="{6A3172B5-102F-51FD-00F3-4D7D767C1D21}"/>
               </a:ext>
             </a:extLst>
           </p:cNvPr>
@@ -941,7 +941,7 @@
           <p:cNvPr id="4" name="日付プレースホルダー 3">
             <a:extLst>
               <a:ext uri="{FF2B5EF4-FFF2-40B4-BE49-F238E27FC236}">
-                <a16:creationId xmlns:a16="http://schemas.microsoft.com/office/drawing/2014/main" id="{996AAD97-FE9D-D962-BCA9-0F86511A308E}"/>
+                <a16:creationId xmlns:a16="http://schemas.microsoft.com/office/drawing/2014/main" id="{8708A20E-837E-5548-859C-8F3E7125622A}"/>
               </a:ext>
             </a:extLst>
           </p:cNvPr>
@@ -957,7 +957,7 @@
           <a:bodyPr/>
           <a:lstStyle/>
           <a:p>
-            <a:fld id="{6F73885A-2398-4E9A-88D7-F47FFA467487}" type="datetimeFigureOut">
+            <a:fld id="{7305A188-8A03-4CAE-87BC-8FFFEDE8EC66}" type="datetimeFigureOut">
               <a:rPr kumimoji="1" lang="ja-JP" altLang="en-US" smtClean="0"/>
               <a:t>2026/7/30</a:t>
             </a:fld>
@@ -970,7 +970,7 @@
           <p:cNvPr id="5" name="フッター プレースホルダー 4">
             <a:extLst>
               <a:ext uri="{FF2B5EF4-FFF2-40B4-BE49-F238E27FC236}">
-                <a16:creationId xmlns:a16="http://schemas.microsoft.com/office/drawing/2014/main" id="{219A89A0-2733-2A1E-E644-50F568EF8C27}"/>
+                <a16:creationId xmlns:a16="http://schemas.microsoft.com/office/drawing/2014/main" id="{BDD164AF-257D-10B5-84F2-93E1C9E05387}"/>
               </a:ext>
             </a:extLst>
           </p:cNvPr>
@@ -995,7 +995,7 @@
           <p:cNvPr id="6" name="スライド番号プレースホルダー 5">
             <a:extLst>
               <a:ext uri="{FF2B5EF4-FFF2-40B4-BE49-F238E27FC236}">
-                <a16:creationId xmlns:a16="http://schemas.microsoft.com/office/drawing/2014/main" id="{70AC3042-49B6-F7F3-646F-4122075397D3}"/>
+                <a16:creationId xmlns:a16="http://schemas.microsoft.com/office/drawing/2014/main" id="{092D514F-54E9-5466-6CEC-E7DB4AF260C1}"/>
               </a:ext>
             </a:extLst>
           </p:cNvPr>
@@ -1011,7 +1011,7 @@
           <a:bodyPr/>
           <a:lstStyle/>
           <a:p>
-            <a:fld id="{0A7A3E27-96CB-4210-9F81-990FF65E78A3}" type="slidenum">
+            <a:fld id="{1C99768D-03BE-4508-990C-439EC936EF6D}" type="slidenum">
               <a:rPr kumimoji="1" lang="ja-JP" altLang="en-US" smtClean="0"/>
               <a:t>‹#›</a:t>
             </a:fld>
@@ -1022,7 +1022,7 @@
     </p:spTree>
     <p:extLst>
       <p:ext uri="{BB962C8B-B14F-4D97-AF65-F5344CB8AC3E}">
-        <p14:creationId xmlns:p14="http://schemas.microsoft.com/office/powerpoint/2010/main" val="3663916761"/>
+        <p14:creationId xmlns:p14="http://schemas.microsoft.com/office/powerpoint/2010/main" val="1358120102"/>
       </p:ext>
     </p:extLst>
   </p:cSld>
@@ -1054,7 +1054,7 @@
           <p:cNvPr id="2" name="タイトル 1">
             <a:extLst>
               <a:ext uri="{FF2B5EF4-FFF2-40B4-BE49-F238E27FC236}">
-                <a16:creationId xmlns:a16="http://schemas.microsoft.com/office/drawing/2014/main" id="{95A55829-3264-00CD-EF0F-4C7F1A4E3649}"/>
+                <a16:creationId xmlns:a16="http://schemas.microsoft.com/office/drawing/2014/main" id="{3B2D5774-A486-8904-7BE9-C95DBF6B6BC4}"/>
               </a:ext>
             </a:extLst>
           </p:cNvPr>
@@ -1091,7 +1091,7 @@
           <p:cNvPr id="3" name="テキスト プレースホルダー 2">
             <a:extLst>
               <a:ext uri="{FF2B5EF4-FFF2-40B4-BE49-F238E27FC236}">
-                <a16:creationId xmlns:a16="http://schemas.microsoft.com/office/drawing/2014/main" id="{938625CA-ACD9-D240-4C36-D15C260BD5AA}"/>
+                <a16:creationId xmlns:a16="http://schemas.microsoft.com/office/drawing/2014/main" id="{F3912F2F-1257-7AA4-51BA-74CFFFF73162}"/>
               </a:ext>
             </a:extLst>
           </p:cNvPr>
@@ -1216,7 +1216,7 @@
           <p:cNvPr id="4" name="日付プレースホルダー 3">
             <a:extLst>
               <a:ext uri="{FF2B5EF4-FFF2-40B4-BE49-F238E27FC236}">
-                <a16:creationId xmlns:a16="http://schemas.microsoft.com/office/drawing/2014/main" id="{273032EA-D2E7-0519-E913-AE4254ADFCBF}"/>
+                <a16:creationId xmlns:a16="http://schemas.microsoft.com/office/drawing/2014/main" id="{006D5B27-700B-D3A3-0108-91783303F141}"/>
               </a:ext>
             </a:extLst>
           </p:cNvPr>
@@ -1232,7 +1232,7 @@
           <a:bodyPr/>
           <a:lstStyle/>
           <a:p>
-            <a:fld id="{6F73885A-2398-4E9A-88D7-F47FFA467487}" type="datetimeFigureOut">
+            <a:fld id="{7305A188-8A03-4CAE-87BC-8FFFEDE8EC66}" type="datetimeFigureOut">
               <a:rPr kumimoji="1" lang="ja-JP" altLang="en-US" smtClean="0"/>
               <a:t>2026/7/30</a:t>
             </a:fld>
@@ -1245,7 +1245,7 @@
           <p:cNvPr id="5" name="フッター プレースホルダー 4">
             <a:extLst>
               <a:ext uri="{FF2B5EF4-FFF2-40B4-BE49-F238E27FC236}">
-                <a16:creationId xmlns:a16="http://schemas.microsoft.com/office/drawing/2014/main" id="{5EF499AC-E8D4-A617-A769-C369A179C8C2}"/>
+                <a16:creationId xmlns:a16="http://schemas.microsoft.com/office/drawing/2014/main" id="{BF5F2629-BA59-93DF-A814-A50C6C860CE3}"/>
               </a:ext>
             </a:extLst>
           </p:cNvPr>
@@ -1270,7 +1270,7 @@
           <p:cNvPr id="6" name="スライド番号プレースホルダー 5">
             <a:extLst>
               <a:ext uri="{FF2B5EF4-FFF2-40B4-BE49-F238E27FC236}">
-                <a16:creationId xmlns:a16="http://schemas.microsoft.com/office/drawing/2014/main" id="{E896DED1-B0FA-3DCD-C1BC-16914AD389D6}"/>
+                <a16:creationId xmlns:a16="http://schemas.microsoft.com/office/drawing/2014/main" id="{2EBFBD06-694A-E0BD-C7E9-C86E357C7BD9}"/>
               </a:ext>
             </a:extLst>
           </p:cNvPr>
@@ -1286,7 +1286,7 @@
           <a:bodyPr/>
           <a:lstStyle/>
           <a:p>
-            <a:fld id="{0A7A3E27-96CB-4210-9F81-990FF65E78A3}" type="slidenum">
+            <a:fld id="{1C99768D-03BE-4508-990C-439EC936EF6D}" type="slidenum">
               <a:rPr kumimoji="1" lang="ja-JP" altLang="en-US" smtClean="0"/>
               <a:t>‹#›</a:t>
             </a:fld>
@@ -1297,7 +1297,7 @@
     </p:spTree>
     <p:extLst>
       <p:ext uri="{BB962C8B-B14F-4D97-AF65-F5344CB8AC3E}">
-        <p14:creationId xmlns:p14="http://schemas.microsoft.com/office/powerpoint/2010/main" val="3486288621"/>
+        <p14:creationId xmlns:p14="http://schemas.microsoft.com/office/powerpoint/2010/main" val="1620960404"/>
       </p:ext>
     </p:extLst>
   </p:cSld>
@@ -1329,7 +1329,7 @@
           <p:cNvPr id="2" name="タイトル 1">
             <a:extLst>
               <a:ext uri="{FF2B5EF4-FFF2-40B4-BE49-F238E27FC236}">
-                <a16:creationId xmlns:a16="http://schemas.microsoft.com/office/drawing/2014/main" id="{067FF70B-B1A2-015A-591E-02217681A191}"/>
+                <a16:creationId xmlns:a16="http://schemas.microsoft.com/office/drawing/2014/main" id="{87C50654-4C6B-CE98-6B6A-6861549599D0}"/>
               </a:ext>
             </a:extLst>
           </p:cNvPr>
@@ -1357,7 +1357,7 @@
           <p:cNvPr id="3" name="コンテンツ プレースホルダー 2">
             <a:extLst>
               <a:ext uri="{FF2B5EF4-FFF2-40B4-BE49-F238E27FC236}">
-                <a16:creationId xmlns:a16="http://schemas.microsoft.com/office/drawing/2014/main" id="{41238194-D738-3529-5D29-720DB384B01C}"/>
+                <a16:creationId xmlns:a16="http://schemas.microsoft.com/office/drawing/2014/main" id="{0FFADE27-A3FE-811D-6780-79B878246A1B}"/>
               </a:ext>
             </a:extLst>
           </p:cNvPr>
@@ -1451,7 +1451,7 @@
           <p:cNvPr id="4" name="コンテンツ プレースホルダー 3">
             <a:extLst>
               <a:ext uri="{FF2B5EF4-FFF2-40B4-BE49-F238E27FC236}">
-                <a16:creationId xmlns:a16="http://schemas.microsoft.com/office/drawing/2014/main" id="{9EADD1E7-1C8B-33A0-EE7D-2DEBA6439335}"/>
+                <a16:creationId xmlns:a16="http://schemas.microsoft.com/office/drawing/2014/main" id="{5B410B7D-B4C3-DF2A-EC3B-403055C37EE7}"/>
               </a:ext>
             </a:extLst>
           </p:cNvPr>
@@ -1545,7 +1545,7 @@
           <p:cNvPr id="5" name="日付プレースホルダー 4">
             <a:extLst>
               <a:ext uri="{FF2B5EF4-FFF2-40B4-BE49-F238E27FC236}">
-                <a16:creationId xmlns:a16="http://schemas.microsoft.com/office/drawing/2014/main" id="{63CAC2AE-391E-BDB3-4CF1-DA0C9541B3F0}"/>
+                <a16:creationId xmlns:a16="http://schemas.microsoft.com/office/drawing/2014/main" id="{79BC7879-2551-9676-FB67-E5BAFD357C77}"/>
               </a:ext>
             </a:extLst>
           </p:cNvPr>
@@ -1561,7 +1561,7 @@
           <a:bodyPr/>
           <a:lstStyle/>
           <a:p>
-            <a:fld id="{6F73885A-2398-4E9A-88D7-F47FFA467487}" type="datetimeFigureOut">
+            <a:fld id="{7305A188-8A03-4CAE-87BC-8FFFEDE8EC66}" type="datetimeFigureOut">
               <a:rPr kumimoji="1" lang="ja-JP" altLang="en-US" smtClean="0"/>
               <a:t>2026/7/30</a:t>
             </a:fld>
@@ -1574,7 +1574,7 @@
           <p:cNvPr id="6" name="フッター プレースホルダー 5">
             <a:extLst>
               <a:ext uri="{FF2B5EF4-FFF2-40B4-BE49-F238E27FC236}">
-                <a16:creationId xmlns:a16="http://schemas.microsoft.com/office/drawing/2014/main" id="{E23055EF-F176-6FB2-6370-E64CC091259C}"/>
+                <a16:creationId xmlns:a16="http://schemas.microsoft.com/office/drawing/2014/main" id="{E5BAA253-08FB-B5A7-CF9E-89FB4212B2C1}"/>
               </a:ext>
             </a:extLst>
           </p:cNvPr>
@@ -1599,7 +1599,7 @@
           <p:cNvPr id="7" name="スライド番号プレースホルダー 6">
             <a:extLst>
               <a:ext uri="{FF2B5EF4-FFF2-40B4-BE49-F238E27FC236}">
-                <a16:creationId xmlns:a16="http://schemas.microsoft.com/office/drawing/2014/main" id="{7F5E5768-6BB4-2A52-F138-11943D135F9E}"/>
+                <a16:creationId xmlns:a16="http://schemas.microsoft.com/office/drawing/2014/main" id="{02EDEC9F-741F-780E-5BC2-0EBAAB4489FA}"/>
               </a:ext>
             </a:extLst>
           </p:cNvPr>
@@ -1615,7 +1615,7 @@
           <a:bodyPr/>
           <a:lstStyle/>
           <a:p>
-            <a:fld id="{0A7A3E27-96CB-4210-9F81-990FF65E78A3}" type="slidenum">
+            <a:fld id="{1C99768D-03BE-4508-990C-439EC936EF6D}" type="slidenum">
               <a:rPr kumimoji="1" lang="ja-JP" altLang="en-US" smtClean="0"/>
               <a:t>‹#›</a:t>
             </a:fld>
@@ -1626,7 +1626,7 @@
     </p:spTree>
     <p:extLst>
       <p:ext uri="{BB962C8B-B14F-4D97-AF65-F5344CB8AC3E}">
-        <p14:creationId xmlns:p14="http://schemas.microsoft.com/office/powerpoint/2010/main" val="1970728184"/>
+        <p14:creationId xmlns:p14="http://schemas.microsoft.com/office/powerpoint/2010/main" val="3500989915"/>
       </p:ext>
     </p:extLst>
   </p:cSld>
@@ -1658,7 +1658,7 @@
           <p:cNvPr id="2" name="タイトル 1">
             <a:extLst>
               <a:ext uri="{FF2B5EF4-FFF2-40B4-BE49-F238E27FC236}">
-                <a16:creationId xmlns:a16="http://schemas.microsoft.com/office/drawing/2014/main" id="{3ED62B83-708D-0F73-BB24-D5BDE27D6441}"/>
+                <a16:creationId xmlns:a16="http://schemas.microsoft.com/office/drawing/2014/main" id="{5756AAF5-751F-66BB-6FA2-A04D0A8F70B6}"/>
               </a:ext>
             </a:extLst>
           </p:cNvPr>
@@ -1691,7 +1691,7 @@
           <p:cNvPr id="3" name="テキスト プレースホルダー 2">
             <a:extLst>
               <a:ext uri="{FF2B5EF4-FFF2-40B4-BE49-F238E27FC236}">
-                <a16:creationId xmlns:a16="http://schemas.microsoft.com/office/drawing/2014/main" id="{868D3DF3-F24F-23F1-9FEB-315B5F729481}"/>
+                <a16:creationId xmlns:a16="http://schemas.microsoft.com/office/drawing/2014/main" id="{CA4CA8E7-8BFF-8B2E-671B-6055FD6DFB70}"/>
               </a:ext>
             </a:extLst>
           </p:cNvPr>
@@ -1762,7 +1762,7 @@
           <p:cNvPr id="4" name="コンテンツ プレースホルダー 3">
             <a:extLst>
               <a:ext uri="{FF2B5EF4-FFF2-40B4-BE49-F238E27FC236}">
-                <a16:creationId xmlns:a16="http://schemas.microsoft.com/office/drawing/2014/main" id="{8B7479AC-0F98-4469-5484-0E276F1A2D37}"/>
+                <a16:creationId xmlns:a16="http://schemas.microsoft.com/office/drawing/2014/main" id="{D2571922-403C-65D1-2F1C-28440FC83CD2}"/>
               </a:ext>
             </a:extLst>
           </p:cNvPr>
@@ -1856,7 +1856,7 @@
           <p:cNvPr id="5" name="テキスト プレースホルダー 4">
             <a:extLst>
               <a:ext uri="{FF2B5EF4-FFF2-40B4-BE49-F238E27FC236}">
-                <a16:creationId xmlns:a16="http://schemas.microsoft.com/office/drawing/2014/main" id="{F950A49D-10B7-BEFA-386C-B6E617B75B2B}"/>
+                <a16:creationId xmlns:a16="http://schemas.microsoft.com/office/drawing/2014/main" id="{2A9BCA57-12CF-A17A-5A51-0BFF4C23D93E}"/>
               </a:ext>
             </a:extLst>
           </p:cNvPr>
@@ -1927,7 +1927,7 @@
           <p:cNvPr id="6" name="コンテンツ プレースホルダー 5">
             <a:extLst>
               <a:ext uri="{FF2B5EF4-FFF2-40B4-BE49-F238E27FC236}">
-                <a16:creationId xmlns:a16="http://schemas.microsoft.com/office/drawing/2014/main" id="{AB8C8CD0-4FB3-0AA3-D338-DF7C0BC8541C}"/>
+                <a16:creationId xmlns:a16="http://schemas.microsoft.com/office/drawing/2014/main" id="{42018640-534B-9129-E27A-1EFC409D0955}"/>
               </a:ext>
             </a:extLst>
           </p:cNvPr>
@@ -2021,7 +2021,7 @@
           <p:cNvPr id="7" name="日付プレースホルダー 6">
             <a:extLst>
               <a:ext uri="{FF2B5EF4-FFF2-40B4-BE49-F238E27FC236}">
-                <a16:creationId xmlns:a16="http://schemas.microsoft.com/office/drawing/2014/main" id="{D0BACF7A-7945-4721-E037-9AA4835C36D2}"/>
+                <a16:creationId xmlns:a16="http://schemas.microsoft.com/office/drawing/2014/main" id="{BEA184D2-7A34-CD1E-47C0-8319EF4E395C}"/>
               </a:ext>
             </a:extLst>
           </p:cNvPr>
@@ -2037,7 +2037,7 @@
           <a:bodyPr/>
           <a:lstStyle/>
           <a:p>
-            <a:fld id="{6F73885A-2398-4E9A-88D7-F47FFA467487}" type="datetimeFigureOut">
+            <a:fld id="{7305A188-8A03-4CAE-87BC-8FFFEDE8EC66}" type="datetimeFigureOut">
               <a:rPr kumimoji="1" lang="ja-JP" altLang="en-US" smtClean="0"/>
               <a:t>2026/7/30</a:t>
             </a:fld>
@@ -2050,7 +2050,7 @@
           <p:cNvPr id="8" name="フッター プレースホルダー 7">
             <a:extLst>
               <a:ext uri="{FF2B5EF4-FFF2-40B4-BE49-F238E27FC236}">
-                <a16:creationId xmlns:a16="http://schemas.microsoft.com/office/drawing/2014/main" id="{6F4AADDF-E055-FC1B-EBBB-27914B6B39E0}"/>
+                <a16:creationId xmlns:a16="http://schemas.microsoft.com/office/drawing/2014/main" id="{AEAB36AB-1F91-F576-FA0B-4ED9EB5C34E3}"/>
               </a:ext>
             </a:extLst>
           </p:cNvPr>
@@ -2075,7 +2075,7 @@
           <p:cNvPr id="9" name="スライド番号プレースホルダー 8">
             <a:extLst>
               <a:ext uri="{FF2B5EF4-FFF2-40B4-BE49-F238E27FC236}">
-                <a16:creationId xmlns:a16="http://schemas.microsoft.com/office/drawing/2014/main" id="{17500160-7280-A0EC-7A29-DDEF6531D5BB}"/>
+                <a16:creationId xmlns:a16="http://schemas.microsoft.com/office/drawing/2014/main" id="{1D76507E-9FB7-5B27-FD48-B831614BA90E}"/>
               </a:ext>
             </a:extLst>
           </p:cNvPr>
@@ -2091,7 +2091,7 @@
           <a:bodyPr/>
           <a:lstStyle/>
           <a:p>
-            <a:fld id="{0A7A3E27-96CB-4210-9F81-990FF65E78A3}" type="slidenum">
+            <a:fld id="{1C99768D-03BE-4508-990C-439EC936EF6D}" type="slidenum">
               <a:rPr kumimoji="1" lang="ja-JP" altLang="en-US" smtClean="0"/>
               <a:t>‹#›</a:t>
             </a:fld>
@@ -2102,7 +2102,7 @@
     </p:spTree>
     <p:extLst>
       <p:ext uri="{BB962C8B-B14F-4D97-AF65-F5344CB8AC3E}">
-        <p14:creationId xmlns:p14="http://schemas.microsoft.com/office/powerpoint/2010/main" val="2440353127"/>
+        <p14:creationId xmlns:p14="http://schemas.microsoft.com/office/powerpoint/2010/main" val="2751627949"/>
       </p:ext>
     </p:extLst>
   </p:cSld>
@@ -2134,7 +2134,7 @@
           <p:cNvPr id="2" name="タイトル 1">
             <a:extLst>
               <a:ext uri="{FF2B5EF4-FFF2-40B4-BE49-F238E27FC236}">
-                <a16:creationId xmlns:a16="http://schemas.microsoft.com/office/drawing/2014/main" id="{7C2C33E6-4287-AD80-DC6B-4771593081B1}"/>
+                <a16:creationId xmlns:a16="http://schemas.microsoft.com/office/drawing/2014/main" id="{4F98D2A6-833C-986B-565F-8F7BEC35239B}"/>
               </a:ext>
             </a:extLst>
           </p:cNvPr>
@@ -2162,7 +2162,7 @@
           <p:cNvPr id="3" name="日付プレースホルダー 2">
             <a:extLst>
               <a:ext uri="{FF2B5EF4-FFF2-40B4-BE49-F238E27FC236}">
-                <a16:creationId xmlns:a16="http://schemas.microsoft.com/office/drawing/2014/main" id="{5C08E159-A3AD-0EAC-A5F0-35EECD6A11B9}"/>
+                <a16:creationId xmlns:a16="http://schemas.microsoft.com/office/drawing/2014/main" id="{D21D8A1A-EDC0-889B-2C7F-DD465154E8A8}"/>
               </a:ext>
             </a:extLst>
           </p:cNvPr>
@@ -2178,7 +2178,7 @@
           <a:bodyPr/>
           <a:lstStyle/>
           <a:p>
-            <a:fld id="{6F73885A-2398-4E9A-88D7-F47FFA467487}" type="datetimeFigureOut">
+            <a:fld id="{7305A188-8A03-4CAE-87BC-8FFFEDE8EC66}" type="datetimeFigureOut">
               <a:rPr kumimoji="1" lang="ja-JP" altLang="en-US" smtClean="0"/>
               <a:t>2026/7/30</a:t>
             </a:fld>
@@ -2191,7 +2191,7 @@
           <p:cNvPr id="4" name="フッター プレースホルダー 3">
             <a:extLst>
               <a:ext uri="{FF2B5EF4-FFF2-40B4-BE49-F238E27FC236}">
-                <a16:creationId xmlns:a16="http://schemas.microsoft.com/office/drawing/2014/main" id="{F77836C4-FD42-47AE-870F-284C30EE5D72}"/>
+                <a16:creationId xmlns:a16="http://schemas.microsoft.com/office/drawing/2014/main" id="{06583B10-9947-FC2C-47B3-F28105560225}"/>
               </a:ext>
             </a:extLst>
           </p:cNvPr>
@@ -2216,7 +2216,7 @@
           <p:cNvPr id="5" name="スライド番号プレースホルダー 4">
             <a:extLst>
               <a:ext uri="{FF2B5EF4-FFF2-40B4-BE49-F238E27FC236}">
-                <a16:creationId xmlns:a16="http://schemas.microsoft.com/office/drawing/2014/main" id="{F08DB6D3-10EF-4B66-C9D9-AA94126BA2FA}"/>
+                <a16:creationId xmlns:a16="http://schemas.microsoft.com/office/drawing/2014/main" id="{0DA9BFD7-405E-0E6A-5044-D4C2E4508D3D}"/>
               </a:ext>
             </a:extLst>
           </p:cNvPr>
@@ -2232,7 +2232,7 @@
           <a:bodyPr/>
           <a:lstStyle/>
           <a:p>
-            <a:fld id="{0A7A3E27-96CB-4210-9F81-990FF65E78A3}" type="slidenum">
+            <a:fld id="{1C99768D-03BE-4508-990C-439EC936EF6D}" type="slidenum">
               <a:rPr kumimoji="1" lang="ja-JP" altLang="en-US" smtClean="0"/>
               <a:t>‹#›</a:t>
             </a:fld>
@@ -2243,7 +2243,7 @@
     </p:spTree>
     <p:extLst>
       <p:ext uri="{BB962C8B-B14F-4D97-AF65-F5344CB8AC3E}">
-        <p14:creationId xmlns:p14="http://schemas.microsoft.com/office/powerpoint/2010/main" val="2302330427"/>
+        <p14:creationId xmlns:p14="http://schemas.microsoft.com/office/powerpoint/2010/main" val="2189940880"/>
       </p:ext>
     </p:extLst>
   </p:cSld>
@@ -2275,7 +2275,7 @@
           <p:cNvPr id="2" name="日付プレースホルダー 1">
             <a:extLst>
               <a:ext uri="{FF2B5EF4-FFF2-40B4-BE49-F238E27FC236}">
-                <a16:creationId xmlns:a16="http://schemas.microsoft.com/office/drawing/2014/main" id="{7C7AAE9F-DBB6-2BC2-73B5-94B5C11584DE}"/>
+                <a16:creationId xmlns:a16="http://schemas.microsoft.com/office/drawing/2014/main" id="{2FEE7C1E-B901-147E-C588-DDA668296DE8}"/>
               </a:ext>
             </a:extLst>
           </p:cNvPr>
@@ -2291,7 +2291,7 @@
           <a:bodyPr/>
           <a:lstStyle/>
           <a:p>
-            <a:fld id="{6F73885A-2398-4E9A-88D7-F47FFA467487}" type="datetimeFigureOut">
+            <a:fld id="{7305A188-8A03-4CAE-87BC-8FFFEDE8EC66}" type="datetimeFigureOut">
               <a:rPr kumimoji="1" lang="ja-JP" altLang="en-US" smtClean="0"/>
               <a:t>2026/7/30</a:t>
             </a:fld>
@@ -2304,7 +2304,7 @@
           <p:cNvPr id="3" name="フッター プレースホルダー 2">
             <a:extLst>
               <a:ext uri="{FF2B5EF4-FFF2-40B4-BE49-F238E27FC236}">
-                <a16:creationId xmlns:a16="http://schemas.microsoft.com/office/drawing/2014/main" id="{29E2804F-F8DF-DD78-48FD-F3B19295AE2E}"/>
+                <a16:creationId xmlns:a16="http://schemas.microsoft.com/office/drawing/2014/main" id="{FC306EC3-0213-DF30-35C1-798818E154B3}"/>
               </a:ext>
             </a:extLst>
           </p:cNvPr>
@@ -2329,7 +2329,7 @@
           <p:cNvPr id="4" name="スライド番号プレースホルダー 3">
             <a:extLst>
               <a:ext uri="{FF2B5EF4-FFF2-40B4-BE49-F238E27FC236}">
-                <a16:creationId xmlns:a16="http://schemas.microsoft.com/office/drawing/2014/main" id="{B5346240-3519-3618-0B8B-BC82732F673F}"/>
+                <a16:creationId xmlns:a16="http://schemas.microsoft.com/office/drawing/2014/main" id="{0642F498-9573-4D21-2C69-0363B6473F60}"/>
               </a:ext>
             </a:extLst>
           </p:cNvPr>
@@ -2345,7 +2345,7 @@
           <a:bodyPr/>
           <a:lstStyle/>
           <a:p>
-            <a:fld id="{0A7A3E27-96CB-4210-9F81-990FF65E78A3}" type="slidenum">
+            <a:fld id="{1C99768D-03BE-4508-990C-439EC936EF6D}" type="slidenum">
               <a:rPr kumimoji="1" lang="ja-JP" altLang="en-US" smtClean="0"/>
               <a:t>‹#›</a:t>
             </a:fld>
@@ -2356,7 +2356,7 @@
     </p:spTree>
     <p:extLst>
       <p:ext uri="{BB962C8B-B14F-4D97-AF65-F5344CB8AC3E}">
-        <p14:creationId xmlns:p14="http://schemas.microsoft.com/office/powerpoint/2010/main" val="2443306543"/>
+        <p14:creationId xmlns:p14="http://schemas.microsoft.com/office/powerpoint/2010/main" val="4003393132"/>
       </p:ext>
     </p:extLst>
   </p:cSld>
@@ -2388,7 +2388,7 @@
           <p:cNvPr id="2" name="タイトル 1">
             <a:extLst>
               <a:ext uri="{FF2B5EF4-FFF2-40B4-BE49-F238E27FC236}">
-                <a16:creationId xmlns:a16="http://schemas.microsoft.com/office/drawing/2014/main" id="{94F9B223-C3E0-0582-93B7-DD5DD17058F9}"/>
+                <a16:creationId xmlns:a16="http://schemas.microsoft.com/office/drawing/2014/main" id="{B67F3555-39A4-EEDC-52F6-6C2B601D8390}"/>
               </a:ext>
             </a:extLst>
           </p:cNvPr>
@@ -2425,7 +2425,7 @@
           <p:cNvPr id="3" name="コンテンツ プレースホルダー 2">
             <a:extLst>
               <a:ext uri="{FF2B5EF4-FFF2-40B4-BE49-F238E27FC236}">
-                <a16:creationId xmlns:a16="http://schemas.microsoft.com/office/drawing/2014/main" id="{F1A89A2B-616D-B65C-9E1F-A9F5D34E3C39}"/>
+                <a16:creationId xmlns:a16="http://schemas.microsoft.com/office/drawing/2014/main" id="{C25CB38F-CCEE-0050-4284-5167D3AF42EE}"/>
               </a:ext>
             </a:extLst>
           </p:cNvPr>
@@ -2547,7 +2547,7 @@
           <p:cNvPr id="4" name="テキスト プレースホルダー 3">
             <a:extLst>
               <a:ext uri="{FF2B5EF4-FFF2-40B4-BE49-F238E27FC236}">
-                <a16:creationId xmlns:a16="http://schemas.microsoft.com/office/drawing/2014/main" id="{A2584DDD-FA7F-D4B4-89BB-77822A70E0DC}"/>
+                <a16:creationId xmlns:a16="http://schemas.microsoft.com/office/drawing/2014/main" id="{1F7714DD-44E9-F04F-3964-9A9A616B319D}"/>
               </a:ext>
             </a:extLst>
           </p:cNvPr>
@@ -2618,7 +2618,7 @@
           <p:cNvPr id="5" name="日付プレースホルダー 4">
             <a:extLst>
               <a:ext uri="{FF2B5EF4-FFF2-40B4-BE49-F238E27FC236}">
-                <a16:creationId xmlns:a16="http://schemas.microsoft.com/office/drawing/2014/main" id="{249C8BFB-6E3A-FA1A-56C0-1ACC68760389}"/>
+                <a16:creationId xmlns:a16="http://schemas.microsoft.com/office/drawing/2014/main" id="{2431E5ED-5FEB-3294-BCA3-E27F467371C3}"/>
               </a:ext>
             </a:extLst>
           </p:cNvPr>
@@ -2634,7 +2634,7 @@
           <a:bodyPr/>
           <a:lstStyle/>
           <a:p>
-            <a:fld id="{6F73885A-2398-4E9A-88D7-F47FFA467487}" type="datetimeFigureOut">
+            <a:fld id="{7305A188-8A03-4CAE-87BC-8FFFEDE8EC66}" type="datetimeFigureOut">
               <a:rPr kumimoji="1" lang="ja-JP" altLang="en-US" smtClean="0"/>
               <a:t>2026/7/30</a:t>
             </a:fld>
@@ -2647,7 +2647,7 @@
           <p:cNvPr id="6" name="フッター プレースホルダー 5">
             <a:extLst>
               <a:ext uri="{FF2B5EF4-FFF2-40B4-BE49-F238E27FC236}">
-                <a16:creationId xmlns:a16="http://schemas.microsoft.com/office/drawing/2014/main" id="{73855D92-4FE8-96FD-AFC3-9254FF02494B}"/>
+                <a16:creationId xmlns:a16="http://schemas.microsoft.com/office/drawing/2014/main" id="{65EDDEB6-49D6-7B03-C53C-8A78B747D7AB}"/>
               </a:ext>
             </a:extLst>
           </p:cNvPr>
@@ -2672,7 +2672,7 @@
           <p:cNvPr id="7" name="スライド番号プレースホルダー 6">
             <a:extLst>
               <a:ext uri="{FF2B5EF4-FFF2-40B4-BE49-F238E27FC236}">
-                <a16:creationId xmlns:a16="http://schemas.microsoft.com/office/drawing/2014/main" id="{77E5E484-770B-32AB-5575-14D19635F90C}"/>
+                <a16:creationId xmlns:a16="http://schemas.microsoft.com/office/drawing/2014/main" id="{2D28D692-B148-9064-36EA-9F1DE13FE3D1}"/>
               </a:ext>
             </a:extLst>
           </p:cNvPr>
@@ -2688,7 +2688,7 @@
           <a:bodyPr/>
           <a:lstStyle/>
           <a:p>
-            <a:fld id="{0A7A3E27-96CB-4210-9F81-990FF65E78A3}" type="slidenum">
+            <a:fld id="{1C99768D-03BE-4508-990C-439EC936EF6D}" type="slidenum">
               <a:rPr kumimoji="1" lang="ja-JP" altLang="en-US" smtClean="0"/>
               <a:t>‹#›</a:t>
             </a:fld>
@@ -2699,7 +2699,7 @@
     </p:spTree>
     <p:extLst>
       <p:ext uri="{BB962C8B-B14F-4D97-AF65-F5344CB8AC3E}">
-        <p14:creationId xmlns:p14="http://schemas.microsoft.com/office/powerpoint/2010/main" val="2727422748"/>
+        <p14:creationId xmlns:p14="http://schemas.microsoft.com/office/powerpoint/2010/main" val="4184382118"/>
       </p:ext>
     </p:extLst>
   </p:cSld>
@@ -2731,7 +2731,7 @@
           <p:cNvPr id="2" name="タイトル 1">
             <a:extLst>
               <a:ext uri="{FF2B5EF4-FFF2-40B4-BE49-F238E27FC236}">
-                <a16:creationId xmlns:a16="http://schemas.microsoft.com/office/drawing/2014/main" id="{84FC965E-CF70-8DF7-77D0-552BE882A02A}"/>
+                <a16:creationId xmlns:a16="http://schemas.microsoft.com/office/drawing/2014/main" id="{522499C5-16EC-3A4F-93EE-D3EABB470548}"/>
               </a:ext>
             </a:extLst>
           </p:cNvPr>
@@ -2768,7 +2768,7 @@
           <p:cNvPr id="3" name="図プレースホルダー 2">
             <a:extLst>
               <a:ext uri="{FF2B5EF4-FFF2-40B4-BE49-F238E27FC236}">
-                <a16:creationId xmlns:a16="http://schemas.microsoft.com/office/drawing/2014/main" id="{69ADBCE1-1187-C8BD-6ACD-24B6B8EE626F}"/>
+                <a16:creationId xmlns:a16="http://schemas.microsoft.com/office/drawing/2014/main" id="{CDF98D1B-73E7-6624-645B-5C1A95ED6044}"/>
               </a:ext>
             </a:extLst>
           </p:cNvPr>
@@ -2835,7 +2835,7 @@
           <p:cNvPr id="4" name="テキスト プレースホルダー 3">
             <a:extLst>
               <a:ext uri="{FF2B5EF4-FFF2-40B4-BE49-F238E27FC236}">
-                <a16:creationId xmlns:a16="http://schemas.microsoft.com/office/drawing/2014/main" id="{8FFB181D-917B-8510-A5BA-BEA6062FB511}"/>
+                <a16:creationId xmlns:a16="http://schemas.microsoft.com/office/drawing/2014/main" id="{9D12950D-F176-6D1D-F827-86142B98C69C}"/>
               </a:ext>
             </a:extLst>
           </p:cNvPr>
@@ -2906,7 +2906,7 @@
           <p:cNvPr id="5" name="日付プレースホルダー 4">
             <a:extLst>
               <a:ext uri="{FF2B5EF4-FFF2-40B4-BE49-F238E27FC236}">
-                <a16:creationId xmlns:a16="http://schemas.microsoft.com/office/drawing/2014/main" id="{1A9DB364-676F-F2A9-C9D4-9D0E432BAE58}"/>
+                <a16:creationId xmlns:a16="http://schemas.microsoft.com/office/drawing/2014/main" id="{2E007849-25D1-BF0A-3C35-B1EA61800FFF}"/>
               </a:ext>
             </a:extLst>
           </p:cNvPr>
@@ -2922,7 +2922,7 @@
           <a:bodyPr/>
           <a:lstStyle/>
           <a:p>
-            <a:fld id="{6F73885A-2398-4E9A-88D7-F47FFA467487}" type="datetimeFigureOut">
+            <a:fld id="{7305A188-8A03-4CAE-87BC-8FFFEDE8EC66}" type="datetimeFigureOut">
               <a:rPr kumimoji="1" lang="ja-JP" altLang="en-US" smtClean="0"/>
               <a:t>2026/7/30</a:t>
             </a:fld>
@@ -2935,7 +2935,7 @@
           <p:cNvPr id="6" name="フッター プレースホルダー 5">
             <a:extLst>
               <a:ext uri="{FF2B5EF4-FFF2-40B4-BE49-F238E27FC236}">
-                <a16:creationId xmlns:a16="http://schemas.microsoft.com/office/drawing/2014/main" id="{D2E6D513-46B8-ADE2-9CFA-597786F19357}"/>
+                <a16:creationId xmlns:a16="http://schemas.microsoft.com/office/drawing/2014/main" id="{60444899-EE4E-BEEB-8AEF-23D160A9D9D4}"/>
               </a:ext>
             </a:extLst>
           </p:cNvPr>
@@ -2960,7 +2960,7 @@
           <p:cNvPr id="7" name="スライド番号プレースホルダー 6">
             <a:extLst>
               <a:ext uri="{FF2B5EF4-FFF2-40B4-BE49-F238E27FC236}">
-                <a16:creationId xmlns:a16="http://schemas.microsoft.com/office/drawing/2014/main" id="{6161E3A3-00B8-19C0-4B19-289678532C89}"/>
+                <a16:creationId xmlns:a16="http://schemas.microsoft.com/office/drawing/2014/main" id="{7FEAFAE7-54DB-1DE7-036B-4C138ECADA35}"/>
               </a:ext>
             </a:extLst>
           </p:cNvPr>
@@ -2976,7 +2976,7 @@
           <a:bodyPr/>
           <a:lstStyle/>
           <a:p>
-            <a:fld id="{0A7A3E27-96CB-4210-9F81-990FF65E78A3}" type="slidenum">
+            <a:fld id="{1C99768D-03BE-4508-990C-439EC936EF6D}" type="slidenum">
               <a:rPr kumimoji="1" lang="ja-JP" altLang="en-US" smtClean="0"/>
               <a:t>‹#›</a:t>
             </a:fld>
@@ -2987,7 +2987,7 @@
     </p:spTree>
     <p:extLst>
       <p:ext uri="{BB962C8B-B14F-4D97-AF65-F5344CB8AC3E}">
-        <p14:creationId xmlns:p14="http://schemas.microsoft.com/office/powerpoint/2010/main" val="2997181094"/>
+        <p14:creationId xmlns:p14="http://schemas.microsoft.com/office/powerpoint/2010/main" val="2122679965"/>
       </p:ext>
     </p:extLst>
   </p:cSld>
@@ -3024,7 +3024,7 @@
           <p:cNvPr id="2" name="タイトル プレースホルダー 1">
             <a:extLst>
               <a:ext uri="{FF2B5EF4-FFF2-40B4-BE49-F238E27FC236}">
-                <a16:creationId xmlns:a16="http://schemas.microsoft.com/office/drawing/2014/main" id="{EF703CF4-7571-5F97-328F-6F0E1A878F11}"/>
+                <a16:creationId xmlns:a16="http://schemas.microsoft.com/office/drawing/2014/main" id="{AE53731E-7116-84A8-BD1D-3C32ACD20C9E}"/>
               </a:ext>
             </a:extLst>
           </p:cNvPr>
@@ -3062,7 +3062,7 @@
           <p:cNvPr id="3" name="テキスト プレースホルダー 2">
             <a:extLst>
               <a:ext uri="{FF2B5EF4-FFF2-40B4-BE49-F238E27FC236}">
-                <a16:creationId xmlns:a16="http://schemas.microsoft.com/office/drawing/2014/main" id="{5F439AE6-FAF6-5881-EB19-2A20025ED2A1}"/>
+                <a16:creationId xmlns:a16="http://schemas.microsoft.com/office/drawing/2014/main" id="{55A21897-7840-331A-CADE-46B76D291807}"/>
               </a:ext>
             </a:extLst>
           </p:cNvPr>
@@ -3161,7 +3161,7 @@
           <p:cNvPr id="4" name="日付プレースホルダー 3">
             <a:extLst>
               <a:ext uri="{FF2B5EF4-FFF2-40B4-BE49-F238E27FC236}">
-                <a16:creationId xmlns:a16="http://schemas.microsoft.com/office/drawing/2014/main" id="{F98316E8-076C-15CC-1C6A-DAF41C0E0913}"/>
+                <a16:creationId xmlns:a16="http://schemas.microsoft.com/office/drawing/2014/main" id="{48D31296-752E-8D41-7673-8E78EDB9BEED}"/>
               </a:ext>
             </a:extLst>
           </p:cNvPr>
@@ -3195,7 +3195,7 @@
             </a:lvl1pPr>
           </a:lstStyle>
           <a:p>
-            <a:fld id="{6F73885A-2398-4E9A-88D7-F47FFA467487}" type="datetimeFigureOut">
+            <a:fld id="{7305A188-8A03-4CAE-87BC-8FFFEDE8EC66}" type="datetimeFigureOut">
               <a:rPr kumimoji="1" lang="ja-JP" altLang="en-US" smtClean="0"/>
               <a:t>2026/7/30</a:t>
             </a:fld>
@@ -3208,7 +3208,7 @@
           <p:cNvPr id="5" name="フッター プレースホルダー 4">
             <a:extLst>
               <a:ext uri="{FF2B5EF4-FFF2-40B4-BE49-F238E27FC236}">
-                <a16:creationId xmlns:a16="http://schemas.microsoft.com/office/drawing/2014/main" id="{E4879E04-AFD3-078F-6236-EC2015F55EFC}"/>
+                <a16:creationId xmlns:a16="http://schemas.microsoft.com/office/drawing/2014/main" id="{8460D936-89E1-15B6-ED8F-C7CB78683D62}"/>
               </a:ext>
             </a:extLst>
           </p:cNvPr>
@@ -3251,7 +3251,7 @@
           <p:cNvPr id="6" name="スライド番号プレースホルダー 5">
             <a:extLst>
               <a:ext uri="{FF2B5EF4-FFF2-40B4-BE49-F238E27FC236}">
-                <a16:creationId xmlns:a16="http://schemas.microsoft.com/office/drawing/2014/main" id="{972A8E7A-FBBC-7636-EA15-C5DC469E9E28}"/>
+                <a16:creationId xmlns:a16="http://schemas.microsoft.com/office/drawing/2014/main" id="{59E3ED41-9AFA-7DE5-A142-D2CD930350F6}"/>
               </a:ext>
             </a:extLst>
           </p:cNvPr>
@@ -3285,7 +3285,7 @@
             </a:lvl1pPr>
           </a:lstStyle>
           <a:p>
-            <a:fld id="{0A7A3E27-96CB-4210-9F81-990FF65E78A3}" type="slidenum">
+            <a:fld id="{1C99768D-03BE-4508-990C-439EC936EF6D}" type="slidenum">
               <a:rPr kumimoji="1" lang="ja-JP" altLang="en-US" smtClean="0"/>
               <a:t>‹#›</a:t>
             </a:fld>
@@ -3296,7 +3296,7 @@
     </p:spTree>
     <p:extLst>
       <p:ext uri="{BB962C8B-B14F-4D97-AF65-F5344CB8AC3E}">
-        <p14:creationId xmlns:p14="http://schemas.microsoft.com/office/powerpoint/2010/main" val="199032893"/>
+        <p14:creationId xmlns:p14="http://schemas.microsoft.com/office/powerpoint/2010/main" val="3432878844"/>
       </p:ext>
     </p:extLst>
   </p:cSld>
@@ -3619,7 +3619,7 @@
           <p:cNvPr id="2" name="テキスト ボックス 1">
             <a:extLst>
               <a:ext uri="{FF2B5EF4-FFF2-40B4-BE49-F238E27FC236}">
-                <a16:creationId xmlns:a16="http://schemas.microsoft.com/office/drawing/2014/main" id="{B3CB64D0-EA70-3E85-2E07-C34E82F02336}"/>
+                <a16:creationId xmlns:a16="http://schemas.microsoft.com/office/drawing/2014/main" id="{574AFA9B-B87A-1811-576C-2137700576FE}"/>
               </a:ext>
             </a:extLst>
           </p:cNvPr>
@@ -3665,7 +3665,7 @@
           <p:cNvPr id="3" name="テキスト ボックス 2">
             <a:extLst>
               <a:ext uri="{FF2B5EF4-FFF2-40B4-BE49-F238E27FC236}">
-                <a16:creationId xmlns:a16="http://schemas.microsoft.com/office/drawing/2014/main" id="{A2C32F61-66F1-C80B-83E4-7F45CFAB9B0B}"/>
+                <a16:creationId xmlns:a16="http://schemas.microsoft.com/office/drawing/2014/main" id="{B36EA2B1-BB06-CC94-35C9-4B97990177E5}"/>
               </a:ext>
             </a:extLst>
           </p:cNvPr>
@@ -3714,7 +3714,7 @@
           <p:cNvPr id="4" name="テキスト ボックス 3">
             <a:extLst>
               <a:ext uri="{FF2B5EF4-FFF2-40B4-BE49-F238E27FC236}">
-                <a16:creationId xmlns:a16="http://schemas.microsoft.com/office/drawing/2014/main" id="{CAC9FD87-0908-D5F4-79FB-6BDAB50BA3E2}"/>
+                <a16:creationId xmlns:a16="http://schemas.microsoft.com/office/drawing/2014/main" id="{2A00A8E7-76C0-BBE9-BD4F-0164CA586603}"/>
               </a:ext>
             </a:extLst>
           </p:cNvPr>
@@ -3754,7 +3754,7 @@
           <p:cNvPr id="5" name="テキスト ボックス 4">
             <a:extLst>
               <a:ext uri="{FF2B5EF4-FFF2-40B4-BE49-F238E27FC236}">
-                <a16:creationId xmlns:a16="http://schemas.microsoft.com/office/drawing/2014/main" id="{76FB7E8B-4385-3886-7AAF-9E1F5C7CFA3F}"/>
+                <a16:creationId xmlns:a16="http://schemas.microsoft.com/office/drawing/2014/main" id="{312BE8E9-B880-3DBA-7F53-74AC252600D5}"/>
               </a:ext>
             </a:extLst>
           </p:cNvPr>
@@ -3801,7 +3801,7 @@
             <a:hlinkClick r:id="" action="ppaction://media"/>
             <a:extLst>
               <a:ext uri="{FF2B5EF4-FFF2-40B4-BE49-F238E27FC236}">
-                <a16:creationId xmlns:a16="http://schemas.microsoft.com/office/drawing/2014/main" id="{4B75714B-CCBF-7114-03F2-2117F5A0CA7A}"/>
+                <a16:creationId xmlns:a16="http://schemas.microsoft.com/office/drawing/2014/main" id="{2C31AF8C-E9F7-29A3-1CA8-702315BD06CD}"/>
               </a:ext>
             </a:extLst>
           </p:cNvPr>
@@ -3836,7 +3836,7 @@
     </p:spTree>
     <p:extLst>
       <p:ext uri="{BB962C8B-B14F-4D97-AF65-F5344CB8AC3E}">
-        <p14:creationId xmlns:p14="http://schemas.microsoft.com/office/powerpoint/2010/main" val="3614132865"/>
+        <p14:creationId xmlns:p14="http://schemas.microsoft.com/office/powerpoint/2010/main" val="3190885473"/>
       </p:ext>
     </p:extLst>
   </p:cSld>
@@ -3960,7 +3960,7 @@
           <p:cNvPr id="2" name="テキスト ボックス 1">
             <a:extLst>
               <a:ext uri="{FF2B5EF4-FFF2-40B4-BE49-F238E27FC236}">
-                <a16:creationId xmlns:a16="http://schemas.microsoft.com/office/drawing/2014/main" id="{96A54E0D-18A9-61D4-89D7-9067CDE28C9A}"/>
+                <a16:creationId xmlns:a16="http://schemas.microsoft.com/office/drawing/2014/main" id="{104779EA-7772-10B8-C65B-02F87F35F2A3}"/>
               </a:ext>
             </a:extLst>
           </p:cNvPr>
@@ -4006,7 +4006,7 @@
           <p:cNvPr id="3" name="テキスト ボックス 2">
             <a:extLst>
               <a:ext uri="{FF2B5EF4-FFF2-40B4-BE49-F238E27FC236}">
-                <a16:creationId xmlns:a16="http://schemas.microsoft.com/office/drawing/2014/main" id="{4CB82C99-E642-0C06-DA28-C7227D076F35}"/>
+                <a16:creationId xmlns:a16="http://schemas.microsoft.com/office/drawing/2014/main" id="{56B63EEE-DB67-78A5-1434-65482D212BE0}"/>
               </a:ext>
             </a:extLst>
           </p:cNvPr>
@@ -4046,7 +4046,7 @@
           <p:cNvPr id="4" name="テキスト ボックス 3">
             <a:extLst>
               <a:ext uri="{FF2B5EF4-FFF2-40B4-BE49-F238E27FC236}">
-                <a16:creationId xmlns:a16="http://schemas.microsoft.com/office/drawing/2014/main" id="{1A62F4F4-0511-9845-9119-81362AC04A24}"/>
+                <a16:creationId xmlns:a16="http://schemas.microsoft.com/office/drawing/2014/main" id="{BBBFCF6B-5ADF-3D0F-E1A5-1DB65F25C61C}"/>
               </a:ext>
             </a:extLst>
           </p:cNvPr>
@@ -4076,14 +4076,17 @@
                 </a:solidFill>
                 <a:latin typeface="Arial" panose="020B0604020202020204" pitchFamily="34" charset="0"/>
               </a:rPr>
-              <a:t>About Laravel Laravel is a web application framework with expressive, elegant syntax</a:t>
-            </a:r>
-            <a:endParaRPr kumimoji="1" lang="ja-JP" altLang="en-US" sz="2000">
-              <a:solidFill>
-                <a:srgbClr val="333333"/>
-              </a:solidFill>
-              <a:latin typeface="Arial" panose="020B0604020202020204" pitchFamily="34" charset="0"/>
-            </a:endParaRPr>
+              <a:t>Hoiku Map</a:t>
+            </a:r>
+            <a:r>
+              <a:rPr kumimoji="1" lang="ja-JP" altLang="en-US" sz="2000">
+                <a:solidFill>
+                  <a:srgbClr val="333333"/>
+                </a:solidFill>
+                <a:latin typeface="Arial" panose="020B0604020202020204" pitchFamily="34" charset="0"/>
+              </a:rPr>
+              <a:t>の目的、構成、実装を公開コードから確認できるプロジェクトです。</a:t>
+            </a:r>
           </a:p>
         </p:txBody>
       </p:sp>
@@ -4092,7 +4095,7 @@
           <p:cNvPr id="5" name="テキスト ボックス 4">
             <a:extLst>
               <a:ext uri="{FF2B5EF4-FFF2-40B4-BE49-F238E27FC236}">
-                <a16:creationId xmlns:a16="http://schemas.microsoft.com/office/drawing/2014/main" id="{74F44F9C-C3B4-E7F2-C866-DDC871C80622}"/>
+                <a16:creationId xmlns:a16="http://schemas.microsoft.com/office/drawing/2014/main" id="{AACDC602-BFB2-31B5-B90A-E39BF907CF96}"/>
               </a:ext>
             </a:extLst>
           </p:cNvPr>
@@ -4139,7 +4142,7 @@
             <a:hlinkClick r:id="" action="ppaction://media"/>
             <a:extLst>
               <a:ext uri="{FF2B5EF4-FFF2-40B4-BE49-F238E27FC236}">
-                <a16:creationId xmlns:a16="http://schemas.microsoft.com/office/drawing/2014/main" id="{48515072-B34D-C7C9-619F-8526C3B8BB3F}"/>
+                <a16:creationId xmlns:a16="http://schemas.microsoft.com/office/drawing/2014/main" id="{402DD5B0-8865-D3D1-70A8-238D57D5DBE8}"/>
               </a:ext>
             </a:extLst>
           </p:cNvPr>
@@ -4174,7 +4177,7 @@
     </p:spTree>
     <p:extLst>
       <p:ext uri="{BB962C8B-B14F-4D97-AF65-F5344CB8AC3E}">
-        <p14:creationId xmlns:p14="http://schemas.microsoft.com/office/powerpoint/2010/main" val="3287744022"/>
+        <p14:creationId xmlns:p14="http://schemas.microsoft.com/office/powerpoint/2010/main" val="2840341973"/>
       </p:ext>
     </p:extLst>
   </p:cSld>
@@ -4183,10 +4186,10 @@
   </p:clrMapOvr>
   <mc:AlternateContent xmlns:mc="http://schemas.openxmlformats.org/markup-compatibility/2006">
     <mc:Choice xmlns:p14="http://schemas.microsoft.com/office/powerpoint/2010/main" Requires="p14">
-      <p:transition spd="slow" p14:dur="2000" advTm="8000"/>
+      <p:transition spd="slow" p14:dur="2000" advTm="7000"/>
     </mc:Choice>
     <mc:Fallback>
-      <p:transition spd="slow" advTm="8000"/>
+      <p:transition spd="slow" advTm="7000"/>
     </mc:Fallback>
   </mc:AlternateContent>
   <p:timing>
@@ -4217,7 +4220,7 @@
                                   <p:childTnLst>
                                     <p:cmd type="call" cmd="playFrom(0.0)">
                                       <p:cBhvr>
-                                        <p:cTn id="6" dur="7780" fill="hold"/>
+                                        <p:cTn id="6" dur="6951" fill="hold"/>
                                         <p:tgtEl>
                                           <p:spTgt spid="6"/>
                                         </p:tgtEl>
@@ -4298,7 +4301,7 @@
           <p:cNvPr id="2" name="テキスト ボックス 1">
             <a:extLst>
               <a:ext uri="{FF2B5EF4-FFF2-40B4-BE49-F238E27FC236}">
-                <a16:creationId xmlns:a16="http://schemas.microsoft.com/office/drawing/2014/main" id="{41DF4995-6775-0AB9-F53A-F68F8626A988}"/>
+                <a16:creationId xmlns:a16="http://schemas.microsoft.com/office/drawing/2014/main" id="{A2FFEC73-BD8F-5500-1B8C-95C5EF79974A}"/>
               </a:ext>
             </a:extLst>
           </p:cNvPr>
@@ -4344,7 +4347,7 @@
           <p:cNvPr id="3" name="テキスト ボックス 2">
             <a:extLst>
               <a:ext uri="{FF2B5EF4-FFF2-40B4-BE49-F238E27FC236}">
-                <a16:creationId xmlns:a16="http://schemas.microsoft.com/office/drawing/2014/main" id="{13493BBC-E188-A611-9FEA-31DF7343F0D7}"/>
+                <a16:creationId xmlns:a16="http://schemas.microsoft.com/office/drawing/2014/main" id="{4C9B68D1-03A6-4484-2D49-F3AA00B88CCF}"/>
               </a:ext>
             </a:extLst>
           </p:cNvPr>
@@ -4384,7 +4387,7 @@
           <p:cNvPr id="4" name="テキスト ボックス 3">
             <a:extLst>
               <a:ext uri="{FF2B5EF4-FFF2-40B4-BE49-F238E27FC236}">
-                <a16:creationId xmlns:a16="http://schemas.microsoft.com/office/drawing/2014/main" id="{559E5DA2-FCF2-6181-74CE-AD5DE64173D3}"/>
+                <a16:creationId xmlns:a16="http://schemas.microsoft.com/office/drawing/2014/main" id="{37308A17-4A94-C2C7-B9E0-C1DE2D7E9997}"/>
               </a:ext>
             </a:extLst>
           </p:cNvPr>
@@ -4497,7 +4500,7 @@
           <p:cNvPr id="5" name="テキスト ボックス 4">
             <a:extLst>
               <a:ext uri="{FF2B5EF4-FFF2-40B4-BE49-F238E27FC236}">
-                <a16:creationId xmlns:a16="http://schemas.microsoft.com/office/drawing/2014/main" id="{3EC769B6-E31E-EFF3-785E-ED0760E70622}"/>
+                <a16:creationId xmlns:a16="http://schemas.microsoft.com/office/drawing/2014/main" id="{114182C5-34E2-B38A-2E81-974F88085778}"/>
               </a:ext>
             </a:extLst>
           </p:cNvPr>
@@ -4544,7 +4547,7 @@
             <a:hlinkClick r:id="" action="ppaction://media"/>
             <a:extLst>
               <a:ext uri="{FF2B5EF4-FFF2-40B4-BE49-F238E27FC236}">
-                <a16:creationId xmlns:a16="http://schemas.microsoft.com/office/drawing/2014/main" id="{9EF51380-4DA7-D8BF-5581-258954CFF816}"/>
+                <a16:creationId xmlns:a16="http://schemas.microsoft.com/office/drawing/2014/main" id="{1E5AB8FA-64CE-B89F-3DD1-7AEBD80B97B1}"/>
               </a:ext>
             </a:extLst>
           </p:cNvPr>
@@ -4579,7 +4582,7 @@
     </p:spTree>
     <p:extLst>
       <p:ext uri="{BB962C8B-B14F-4D97-AF65-F5344CB8AC3E}">
-        <p14:creationId xmlns:p14="http://schemas.microsoft.com/office/powerpoint/2010/main" val="3572270251"/>
+        <p14:creationId xmlns:p14="http://schemas.microsoft.com/office/powerpoint/2010/main" val="2087189600"/>
       </p:ext>
     </p:extLst>
   </p:cSld>
@@ -4703,7 +4706,7 @@
           <p:cNvPr id="2" name="テキスト ボックス 1">
             <a:extLst>
               <a:ext uri="{FF2B5EF4-FFF2-40B4-BE49-F238E27FC236}">
-                <a16:creationId xmlns:a16="http://schemas.microsoft.com/office/drawing/2014/main" id="{1C2D7F41-6D83-3DFF-1C59-295A3E6F365E}"/>
+                <a16:creationId xmlns:a16="http://schemas.microsoft.com/office/drawing/2014/main" id="{8E9121AC-EB60-740B-1C0B-B2A782DD25DF}"/>
               </a:ext>
             </a:extLst>
           </p:cNvPr>
@@ -4749,7 +4752,7 @@
           <p:cNvPr id="3" name="テキスト ボックス 2">
             <a:extLst>
               <a:ext uri="{FF2B5EF4-FFF2-40B4-BE49-F238E27FC236}">
-                <a16:creationId xmlns:a16="http://schemas.microsoft.com/office/drawing/2014/main" id="{39BB02EA-2E2E-20DB-6210-EE2210A19FFE}"/>
+                <a16:creationId xmlns:a16="http://schemas.microsoft.com/office/drawing/2014/main" id="{EFBB2145-3858-7A27-DDAB-5FBD218F0909}"/>
               </a:ext>
             </a:extLst>
           </p:cNvPr>
@@ -4789,7 +4792,7 @@
           <p:cNvPr id="4" name="テキスト ボックス 3">
             <a:extLst>
               <a:ext uri="{FF2B5EF4-FFF2-40B4-BE49-F238E27FC236}">
-                <a16:creationId xmlns:a16="http://schemas.microsoft.com/office/drawing/2014/main" id="{815C0345-1DA9-E7FB-152B-7517DCCD7B7D}"/>
+                <a16:creationId xmlns:a16="http://schemas.microsoft.com/office/drawing/2014/main" id="{47228B42-726B-57BD-9931-6697EC820052}"/>
               </a:ext>
             </a:extLst>
           </p:cNvPr>
@@ -4899,7 +4902,7 @@
           <p:cNvPr id="5" name="テキスト ボックス 4">
             <a:extLst>
               <a:ext uri="{FF2B5EF4-FFF2-40B4-BE49-F238E27FC236}">
-                <a16:creationId xmlns:a16="http://schemas.microsoft.com/office/drawing/2014/main" id="{AB56B41B-D996-93FC-278E-02E67FD6EBC6}"/>
+                <a16:creationId xmlns:a16="http://schemas.microsoft.com/office/drawing/2014/main" id="{ED43EEF4-BFF0-26A8-B224-8596FC223C01}"/>
               </a:ext>
             </a:extLst>
           </p:cNvPr>
@@ -4946,7 +4949,7 @@
             <a:hlinkClick r:id="" action="ppaction://media"/>
             <a:extLst>
               <a:ext uri="{FF2B5EF4-FFF2-40B4-BE49-F238E27FC236}">
-                <a16:creationId xmlns:a16="http://schemas.microsoft.com/office/drawing/2014/main" id="{B90CCADD-1F1C-C415-A28D-7D4EB4A938DA}"/>
+                <a16:creationId xmlns:a16="http://schemas.microsoft.com/office/drawing/2014/main" id="{14C7C855-DEAF-E955-B0FE-5BED831D28E7}"/>
               </a:ext>
             </a:extLst>
           </p:cNvPr>
@@ -4981,7 +4984,7 @@
     </p:spTree>
     <p:extLst>
       <p:ext uri="{BB962C8B-B14F-4D97-AF65-F5344CB8AC3E}">
-        <p14:creationId xmlns:p14="http://schemas.microsoft.com/office/powerpoint/2010/main" val="2655224229"/>
+        <p14:creationId xmlns:p14="http://schemas.microsoft.com/office/powerpoint/2010/main" val="3499614063"/>
       </p:ext>
     </p:extLst>
   </p:cSld>
@@ -5105,7 +5108,7 @@
           <p:cNvPr id="2" name="テキスト ボックス 1">
             <a:extLst>
               <a:ext uri="{FF2B5EF4-FFF2-40B4-BE49-F238E27FC236}">
-                <a16:creationId xmlns:a16="http://schemas.microsoft.com/office/drawing/2014/main" id="{B672C15A-C3A7-510D-7D32-8A9390D1B692}"/>
+                <a16:creationId xmlns:a16="http://schemas.microsoft.com/office/drawing/2014/main" id="{2F7FE9D4-9272-8CF1-A326-4CFBDE55E8B5}"/>
               </a:ext>
             </a:extLst>
           </p:cNvPr>
@@ -5151,7 +5154,7 @@
           <p:cNvPr id="3" name="テキスト ボックス 2">
             <a:extLst>
               <a:ext uri="{FF2B5EF4-FFF2-40B4-BE49-F238E27FC236}">
-                <a16:creationId xmlns:a16="http://schemas.microsoft.com/office/drawing/2014/main" id="{6E4D0331-6728-86A4-65EF-1C18C84EE3CD}"/>
+                <a16:creationId xmlns:a16="http://schemas.microsoft.com/office/drawing/2014/main" id="{3AF45619-7D5B-70FA-E761-DB19ACF1E748}"/>
               </a:ext>
             </a:extLst>
           </p:cNvPr>
@@ -5191,7 +5194,7 @@
           <p:cNvPr id="4" name="テキスト ボックス 3">
             <a:extLst>
               <a:ext uri="{FF2B5EF4-FFF2-40B4-BE49-F238E27FC236}">
-                <a16:creationId xmlns:a16="http://schemas.microsoft.com/office/drawing/2014/main" id="{9DE483AC-BF67-2E0E-8AA4-DDEC69F1D475}"/>
+                <a16:creationId xmlns:a16="http://schemas.microsoft.com/office/drawing/2014/main" id="{6025F3A5-0B19-264E-7456-353FBDF0AA19}"/>
               </a:ext>
             </a:extLst>
           </p:cNvPr>
@@ -5221,25 +5224,7 @@
                 </a:solidFill>
                 <a:latin typeface="Arial" panose="020B0604020202020204" pitchFamily="34" charset="0"/>
               </a:rPr>
-              <a:t>保育園マップ（地図</a:t>
-            </a:r>
-            <a:r>
-              <a:rPr kumimoji="1" lang="en-US" altLang="ja-JP" sz="2000">
-                <a:solidFill>
-                  <a:srgbClr val="333333"/>
-                </a:solidFill>
-                <a:latin typeface="Arial" panose="020B0604020202020204" pitchFamily="34" charset="0"/>
-              </a:rPr>
-              <a:t>×UGC×</a:t>
-            </a:r>
-            <a:r>
-              <a:rPr kumimoji="1" lang="ja-JP" altLang="en-US" sz="2000">
-                <a:solidFill>
-                  <a:srgbClr val="333333"/>
-                </a:solidFill>
-                <a:latin typeface="Arial" panose="020B0604020202020204" pitchFamily="34" charset="0"/>
-              </a:rPr>
-              <a:t>空きあり通知・見学入園相談受付）を新規構築</a:t>
+              <a:t>直近のコミットでは、実装の見直しと継続的な改善が行われました。</a:t>
             </a:r>
           </a:p>
         </p:txBody>
@@ -5249,7 +5234,7 @@
           <p:cNvPr id="5" name="テキスト ボックス 4">
             <a:extLst>
               <a:ext uri="{FF2B5EF4-FFF2-40B4-BE49-F238E27FC236}">
-                <a16:creationId xmlns:a16="http://schemas.microsoft.com/office/drawing/2014/main" id="{2ED35C60-EF66-55CA-E47A-FC695289BC7B}"/>
+                <a16:creationId xmlns:a16="http://schemas.microsoft.com/office/drawing/2014/main" id="{6A2127AF-7924-DFEE-3BAB-53474173132B}"/>
               </a:ext>
             </a:extLst>
           </p:cNvPr>
@@ -5296,7 +5281,7 @@
             <a:hlinkClick r:id="" action="ppaction://media"/>
             <a:extLst>
               <a:ext uri="{FF2B5EF4-FFF2-40B4-BE49-F238E27FC236}">
-                <a16:creationId xmlns:a16="http://schemas.microsoft.com/office/drawing/2014/main" id="{1FD75CAA-6C5A-04BB-01E2-BA54F18736B5}"/>
+                <a16:creationId xmlns:a16="http://schemas.microsoft.com/office/drawing/2014/main" id="{CFDCF8FF-50CA-D8C0-E75B-C12F3AF9B652}"/>
               </a:ext>
             </a:extLst>
           </p:cNvPr>
@@ -5331,7 +5316,7 @@
     </p:spTree>
     <p:extLst>
       <p:ext uri="{BB962C8B-B14F-4D97-AF65-F5344CB8AC3E}">
-        <p14:creationId xmlns:p14="http://schemas.microsoft.com/office/powerpoint/2010/main" val="110199091"/>
+        <p14:creationId xmlns:p14="http://schemas.microsoft.com/office/powerpoint/2010/main" val="3285417264"/>
       </p:ext>
     </p:extLst>
   </p:cSld>
@@ -5340,10 +5325,10 @@
   </p:clrMapOvr>
   <mc:AlternateContent xmlns:mc="http://schemas.openxmlformats.org/markup-compatibility/2006">
     <mc:Choice xmlns:p14="http://schemas.microsoft.com/office/powerpoint/2010/main" Requires="p14">
-      <p:transition spd="slow" p14:dur="2000" advTm="13000"/>
+      <p:transition spd="slow" p14:dur="2000" advTm="7000"/>
     </mc:Choice>
     <mc:Fallback>
-      <p:transition spd="slow" advTm="13000"/>
+      <p:transition spd="slow" advTm="7000"/>
     </mc:Fallback>
   </mc:AlternateContent>
   <p:timing>
@@ -5374,7 +5359,7 @@
                                   <p:childTnLst>
                                     <p:cmd type="call" cmd="playFrom(0.0)">
                                       <p:cBhvr>
-                                        <p:cTn id="6" dur="12114" fill="hold"/>
+                                        <p:cTn id="6" dur="6076" fill="hold"/>
                                         <p:tgtEl>
                                           <p:spTgt spid="6"/>
                                         </p:tgtEl>
@@ -5455,7 +5440,7 @@
           <p:cNvPr id="2" name="テキスト ボックス 1">
             <a:extLst>
               <a:ext uri="{FF2B5EF4-FFF2-40B4-BE49-F238E27FC236}">
-                <a16:creationId xmlns:a16="http://schemas.microsoft.com/office/drawing/2014/main" id="{6E8770F1-134A-4008-B233-456D1EE113E4}"/>
+                <a16:creationId xmlns:a16="http://schemas.microsoft.com/office/drawing/2014/main" id="{8F3B94D4-C663-2EDA-D533-E0CD67AA0C83}"/>
               </a:ext>
             </a:extLst>
           </p:cNvPr>
@@ -5501,7 +5486,7 @@
           <p:cNvPr id="3" name="テキスト ボックス 2">
             <a:extLst>
               <a:ext uri="{FF2B5EF4-FFF2-40B4-BE49-F238E27FC236}">
-                <a16:creationId xmlns:a16="http://schemas.microsoft.com/office/drawing/2014/main" id="{D8718D49-5C25-006F-4467-D86FE9A323BE}"/>
+                <a16:creationId xmlns:a16="http://schemas.microsoft.com/office/drawing/2014/main" id="{0D6C10D3-A4B4-A269-8266-26AD9CBEE4F4}"/>
               </a:ext>
             </a:extLst>
           </p:cNvPr>
@@ -5541,7 +5526,7 @@
           <p:cNvPr id="4" name="テキスト ボックス 3">
             <a:extLst>
               <a:ext uri="{FF2B5EF4-FFF2-40B4-BE49-F238E27FC236}">
-                <a16:creationId xmlns:a16="http://schemas.microsoft.com/office/drawing/2014/main" id="{47682D01-1C52-9451-B400-C8993DE7F567}"/>
+                <a16:creationId xmlns:a16="http://schemas.microsoft.com/office/drawing/2014/main" id="{68F2BC5F-4694-A8DE-0270-EF84743EC40B}"/>
               </a:ext>
             </a:extLst>
           </p:cNvPr>
@@ -5606,7 +5591,7 @@
           <p:cNvPr id="5" name="テキスト ボックス 4">
             <a:extLst>
               <a:ext uri="{FF2B5EF4-FFF2-40B4-BE49-F238E27FC236}">
-                <a16:creationId xmlns:a16="http://schemas.microsoft.com/office/drawing/2014/main" id="{B2669840-D925-338E-0717-648310EC681F}"/>
+                <a16:creationId xmlns:a16="http://schemas.microsoft.com/office/drawing/2014/main" id="{B5F586D5-52EC-5B5B-BB54-7B78A302D944}"/>
               </a:ext>
             </a:extLst>
           </p:cNvPr>
@@ -5653,7 +5638,7 @@
             <a:hlinkClick r:id="" action="ppaction://media"/>
             <a:extLst>
               <a:ext uri="{FF2B5EF4-FFF2-40B4-BE49-F238E27FC236}">
-                <a16:creationId xmlns:a16="http://schemas.microsoft.com/office/drawing/2014/main" id="{041B6462-F54D-6312-E2B6-5EE9124BCB76}"/>
+                <a16:creationId xmlns:a16="http://schemas.microsoft.com/office/drawing/2014/main" id="{E102F387-3F09-17EA-6281-B3D376ED987B}"/>
               </a:ext>
             </a:extLst>
           </p:cNvPr>
@@ -5688,7 +5673,7 @@
     </p:spTree>
     <p:extLst>
       <p:ext uri="{BB962C8B-B14F-4D97-AF65-F5344CB8AC3E}">
-        <p14:creationId xmlns:p14="http://schemas.microsoft.com/office/powerpoint/2010/main" val="6845015"/>
+        <p14:creationId xmlns:p14="http://schemas.microsoft.com/office/powerpoint/2010/main" val="3219029837"/>
       </p:ext>
     </p:extLst>
   </p:cSld>
